--- a/claude/defense/reference_defense_R2.pptx
+++ b/claude/defense/reference_defense_R2.pptx
@@ -3439,7 +3439,7 @@
         </a:spcBef>
         <a:buFont typeface="Arial"/>
         <a:buChar char="•"/>
-        <a:defRPr sz="1800" kern="1200">
+        <a:defRPr sz="1600" kern="1200">
           <a:solidFill>
             <a:schemeClr val="tx1"/>
           </a:solidFill>
@@ -3454,7 +3454,7 @@
         </a:spcBef>
         <a:buFont typeface="Arial"/>
         <a:buChar char="–"/>
-        <a:defRPr sz="1600" kern="1200">
+        <a:defRPr sz="1400" kern="1200">
           <a:solidFill>
             <a:schemeClr val="tx1"/>
           </a:solidFill>

--- a/claude/defense/reference_defense_R2.pptx
+++ b/claude/defense/reference_defense_R2.pptx
@@ -3439,7 +3439,7 @@
         </a:spcBef>
         <a:buFont typeface="Arial"/>
         <a:buChar char="•"/>
-        <a:defRPr sz="1600" kern="1200">
+        <a:defRPr sz="1800" kern="1200">
           <a:solidFill>
             <a:schemeClr val="tx1"/>
           </a:solidFill>
@@ -3454,7 +3454,7 @@
         </a:spcBef>
         <a:buFont typeface="Arial"/>
         <a:buChar char="–"/>
-        <a:defRPr sz="1400" kern="1200">
+        <a:defRPr sz="1600" kern="1200">
           <a:solidFill>
             <a:schemeClr val="tx1"/>
           </a:solidFill>
